--- a/branded_docs/VBX_Relian_Substrate_Briefing.pptx
+++ b/branded_docs/VBX_Relian_Substrate_Briefing.pptx
@@ -1547,29 +1547,9 @@
           <a:ln/>
         </p:spPr>
       </p:sp>
-      <p:sp>
-        <p:nvSpPr>
-          <p:cNvPr id="3" name="Shape 1"/>
-          <p:cNvSpPr/>
-          <p:nvPr/>
-        </p:nvSpPr>
-        <p:spPr>
-          <a:xfrm>
-            <a:off x="548640" y="1371600"/>
-            <a:ext cx="1051560" cy="1051560"/>
-          </a:xfrm>
-          <a:prstGeom prst="ellipse">
-            <a:avLst/>
-          </a:prstGeom>
-          <a:solidFill>
-            <a:srgbClr val="2EA891"/>
-          </a:solidFill>
-          <a:ln/>
-        </p:spPr>
-      </p:sp>
       <p:pic>
         <p:nvPicPr>
-          <p:cNvPr id="4" name="Image 0" descr="preencoded.png">    </p:cNvPr>
+          <p:cNvPr id="16" name="Picture 15" descr="relian_mark_dark.png"/>
           <p:cNvPicPr>
             <a:picLocks noChangeAspect="1"/>
           </p:cNvPicPr>
@@ -1583,8 +1563,8 @@
         </p:blipFill>
         <p:spPr>
           <a:xfrm>
-            <a:off x="822046" y="1645006"/>
-            <a:ext cx="504749" cy="504749"/>
+            <a:off x="548640" y="1371600"/>
+            <a:ext cx="812321" cy="1051560"/>
           </a:xfrm>
           <a:prstGeom prst="rect">
             <a:avLst/>

--- a/branded_docs/VBX_Relian_Substrate_Briefing.pptx
+++ b/branded_docs/VBX_Relian_Substrate_Briefing.pptx
@@ -1880,7 +1880,7 @@
                 <a:ea typeface="Arial" pitchFamily="34" charset="-122"/>
                 <a:cs typeface="Arial" pitchFamily="34" charset="-120"/>
               </a:rPr>
-              <a:t>Internal technical briefing  ·  Prepared for Akil &amp; AJ  ·  A. K. Wooden, Sr.  ·  Visionblox LLC / Relian™  ·  Montana MAPS  SPB26-0608GW-VSNBLX</a:t>
+              <a:t>Internal technical briefing  ·  Prepared for technical leadership  ·  A. K. Wooden, Sr.  ·  Visionblox LLC / Relian™  ·  Montana MAPS  SPB26-0608GW-VSNBLX</a:t>
             </a:r>
             <a:endParaRPr lang="en-US" sz="1050" dirty="0"/>
           </a:p>
@@ -7801,7 +7801,7 @@
                 <a:ea typeface="Arial" pitchFamily="34" charset="-122"/>
                 <a:cs typeface="Arial" pitchFamily="34" charset="-120"/>
               </a:rPr>
-              <a:t>Akil: Track B infrastructure  ·  AJ: database  ·  Khaalis: judgment layer + key custody</a:t>
+              <a:t>Principal architect: Track B infrastructure  ·  Data engineering: database  ·  Khaalis: judgment layer + key custody</a:t>
             </a:r>
             <a:endParaRPr lang="en-US" sz="1050" dirty="0"/>
           </a:p>
